--- a/docs/TelecomEgypt_Assistant.pptx
+++ b/docs/TelecomEgypt_Assistant.pptx
@@ -5235,7 +5235,7 @@
                 </a:solidFill>
                 <a:latin typeface="Segoe UI"/>
               </a:rPr>
-              <a:t>18 ms</a:t>
+              <a:t>19 ms</a:t>
             </a:r>
           </a:p>
         </p:txBody>
@@ -5349,7 +5349,7 @@
                 </a:solidFill>
                 <a:latin typeface="Segoe UI"/>
               </a:rPr>
-              <a:t>126</a:t>
+              <a:t>317</a:t>
             </a:r>
           </a:p>
         </p:txBody>
@@ -6754,7 +6754,7 @@
                 </a:solidFill>
                 <a:latin typeface="Segoe UI"/>
               </a:rPr>
-              <a:t>over SQLite: check_bill_balance (read), create_support_ticket (write)</a:t>
+              <a:t>over SQLite: check_bill_balance (read), create_support_ticket (write). Results are rendered by template, never generated.</a:t>
             </a:r>
           </a:p>
           <a:p>
@@ -6770,7 +6770,7 @@
                 </a:solidFill>
                 <a:latin typeface="Segoe UI"/>
               </a:rPr>
-              <a:t>PII by regex with a Luhn check  </a:t>
+              <a:t>PII is masked in the question AND in retrieved passages  </a:t>
             </a:r>
             <a:r>
               <a:rPr sz="1600">
@@ -6779,7 +6779,7 @@
                 </a:solidFill>
                 <a:latin typeface="Segoe UI"/>
               </a:rPr>
-              <a:t>— so an order reference is not masked as a card. Over-masking removes information the model needs.</a:t>
+              <a:t>from the customer's own documents — and again at every write: traces, handoff queue. Luhn-checked, so an order reference is not masked as a card.</a:t>
             </a:r>
           </a:p>
           <a:p>
@@ -6820,7 +6820,7 @@
                 </a:solidFill>
                 <a:latin typeface="Segoe UI"/>
               </a:rPr>
-              <a:t>Tests assert the NEGATIVE cases:  </a:t>
+              <a:t>Operator endpoints sit behind a token.  </a:t>
             </a:r>
             <a:r>
               <a:rPr sz="1600">
@@ -6829,7 +6829,7 @@
                 </a:solidFill>
                 <a:latin typeface="Segoe UI"/>
               </a:rPr>
-              <a:t>injection blocked, PII never reaching the model, unauthorised action refused, cross-session retrieval impossible.</a:t>
+              <a:t>A session grants access to that session only.</a:t>
             </a:r>
           </a:p>
           <a:p>
@@ -6839,13 +6839,22 @@
               </a:spcAft>
             </a:pPr>
             <a:r>
+              <a:rPr sz="1600" b="1">
+                <a:solidFill>
+                  <a:srgbClr val="6B2D8B"/>
+                </a:solidFill>
+                <a:latin typeface="Segoe UI"/>
+              </a:rPr>
+              <a:t>Tests assert the NEGATIVE cases,  </a:t>
+            </a:r>
+            <a:r>
               <a:rPr sz="1600">
                 <a:solidFill>
                   <a:srgbClr val="1A1A2E"/>
                 </a:solidFill>
                 <a:latin typeface="Segoe UI"/>
               </a:rPr>
-              <a:t>•  </a:t>
+              <a:t>including a turn-level test that drives the real pipeline with a scripted model and asserts what the model SAW.</a:t>
             </a:r>
           </a:p>
           <a:p>
@@ -6870,7 +6879,7 @@
                 </a:solidFill>
                 <a:latin typeface="Segoe UI"/>
               </a:rPr>
-              <a:t>guardrails are pattern-based. They stop scripted attempts, not a determined adversary. The architecture does not rely on them — the model has no database access regardless.</a:t>
+              <a:t>guardrails are pattern-based and stop scripted attempts, not a determined adversary. The architecture does not rely on them.</a:t>
             </a:r>
           </a:p>
         </p:txBody>
@@ -7135,6 +7144,31 @@
                 </a:solidFill>
                 <a:latin typeface="Segoe UI"/>
               </a:rPr>
+              <a:t>Identity is scoped too:  </a:t>
+            </a:r>
+            <a:r>
+              <a:rPr sz="1600">
+                <a:solidFill>
+                  <a:srgbClr val="1A1A2E"/>
+                </a:solidFill>
+                <a:latin typeface="Segoe UI"/>
+              </a:rPr>
+              <a:t>chunk ids include the session, so two users uploading bill.pdf can never overwrite each other.</a:t>
+            </a:r>
+          </a:p>
+          <a:p>
+            <a:pPr>
+              <a:spcAft>
+                <a:spcPts val="1000"/>
+              </a:spcAft>
+            </a:pPr>
+            <a:r>
+              <a:rPr sz="1600" b="1">
+                <a:solidFill>
+                  <a:srgbClr val="6B2D8B"/>
+                </a:solidFill>
+                <a:latin typeface="Segoe UI"/>
+              </a:rPr>
               <a:t>Eviction is real:  </a:t>
             </a:r>
             <a:r>
@@ -7144,7 +7178,7 @@
                 </a:solidFill>
                 <a:latin typeface="Segoe UI"/>
               </a:rPr>
-              <a:t>files and embeddings are both deleted at session end.</a:t>
+              <a:t>files, embeddings and cached search state are all dropped at session end.</a:t>
             </a:r>
           </a:p>
         </p:txBody>
@@ -7256,7 +7290,7 @@
         </p:nvGraphicFramePr>
         <p:xfrm>
           <a:off x="640080" y="1234440"/>
-          <a:ext cx="10881360" cy="2194560"/>
+          <a:ext cx="10881360" cy="2560320"/>
         </p:xfrm>
         <a:graphic>
           <a:graphicData uri="http://schemas.openxmlformats.org/drawingml/2006/table">
@@ -7532,6 +7566,50 @@
                   </a:tcPr>
                 </a:tc>
               </a:tr>
+              <a:tr h="365760">
+                <a:tc>
+                  <a:txBody>
+                    <a:bodyPr/>
+                    <a:lstStyle/>
+                    <a:p>
+                      <a:r>
+                        <a:rPr sz="1300">
+                          <a:solidFill>
+                            <a:srgbClr val="1A1A2E"/>
+                          </a:solidFill>
+                        </a:rPr>
+                        <a:t>Models (CPU)</a:t>
+                      </a:r>
+                    </a:p>
+                  </a:txBody>
+                  <a:tcPr>
+                    <a:solidFill>
+                      <a:srgbClr val="F4F4F8"/>
+                    </a:solidFill>
+                  </a:tcPr>
+                </a:tc>
+                <a:tc>
+                  <a:txBody>
+                    <a:bodyPr/>
+                    <a:lstStyle/>
+                    <a:p>
+                      <a:r>
+                        <a:rPr sz="1300">
+                          <a:solidFill>
+                            <a:srgbClr val="1A1A2E"/>
+                          </a:solidFill>
+                        </a:rPr>
+                        <a:t>Qwen3-4B-Instruct Q4 · MiniLM-L12 embeddings · Whisper-small int8 · Piper — Apache-2.0 / MIT / public domain</a:t>
+                      </a:r>
+                    </a:p>
+                  </a:txBody>
+                  <a:tcPr>
+                    <a:solidFill>
+                      <a:srgbClr val="F4F4F8"/>
+                    </a:solidFill>
+                  </a:tcPr>
+                </a:tc>
+              </a:tr>
             </a:tbl>
           </a:graphicData>
         </a:graphic>
@@ -7746,7 +7824,7 @@
                 </a:solidFill>
                 <a:latin typeface="Segoe UI"/>
               </a:rPr>
-              <a:t>•  It is the strongest multilingual embedder in the shortlist.</a:t>
+              <a:t>•  It is the strongest multilingual embedder in the shortlist. jina-reranker-v2 and f5-tts-egyptian-arabic carry the same licence.</a:t>
             </a:r>
           </a:p>
           <a:p>
@@ -7756,13 +7834,22 @@
               </a:spcAft>
             </a:pPr>
             <a:r>
+              <a:rPr sz="1600" b="1">
+                <a:solidFill>
+                  <a:srgbClr val="6B2D8B"/>
+                </a:solidFill>
+                <a:latin typeface="Segoe UI"/>
+              </a:rPr>
+              <a:t>Replaced with BAAI/bge-m3 (MIT)  </a:t>
+            </a:r>
+            <a:r>
               <a:rPr sz="1600">
                 <a:solidFill>
                   <a:srgbClr val="1A1A2E"/>
                 </a:solidFill>
                 <a:latin typeface="Segoe UI"/>
               </a:rPr>
-              <a:t>•  Same for jina-reranker-v2 and f5-tts-egyptian-arabic.</a:t>
+              <a:t>— which also has ~20× the adoption. Zero cost to switch.</a:t>
             </a:r>
           </a:p>
           <a:p>
@@ -7778,7 +7865,7 @@
                 </a:solidFill>
                 <a:latin typeface="Segoe UI"/>
               </a:rPr>
-              <a:t>Replaced with BAAI/bge-m3 (MIT)  </a:t>
+              <a:t>Licence is a property of the training data, not the runtime:  </a:t>
             </a:r>
             <a:r>
               <a:rPr sz="1600">
@@ -7787,7 +7874,7 @@
                 </a:solidFill>
                 <a:latin typeface="Segoe UI"/>
               </a:rPr>
-              <a:t>— which also has ~20× the adoption. Zero cost to switch.</a:t>
+              <a:t>Piper is MIT, but the Lessac-trained voice (research-only corpus) and Qwen2.5-3B (Qwen Research licence) fail the same filter.</a:t>
             </a:r>
           </a:p>
           <a:p>
@@ -7803,7 +7890,7 @@
                 </a:solidFill>
                 <a:latin typeface="Segoe UI"/>
               </a:rPr>
-              <a:t>Licence is a hard filter,  </a:t>
+              <a:t>Mechanical, not remembered:  </a:t>
             </a:r>
             <a:r>
               <a:rPr sz="1600">
@@ -7812,7 +7899,32 @@
                 </a:solidFill>
                 <a:latin typeface="Segoe UI"/>
               </a:rPr>
-              <a:t>checked before quality. A non-commercial model in a customer-facing telecom assistant fails review for reasons that have nothing to do with benchmark scores.</a:t>
+              <a:t>every model in a core slot is registered with the licence from its own card, and a test fails if one is missing or non-commercial.</a:t>
+            </a:r>
+          </a:p>
+          <a:p>
+            <a:pPr>
+              <a:spcAft>
+                <a:spcPts val="1000"/>
+              </a:spcAft>
+            </a:pPr>
+            <a:r>
+              <a:rPr sz="1600" b="1">
+                <a:solidFill>
+                  <a:srgbClr val="6B2D8B"/>
+                </a:solidFill>
+                <a:latin typeface="Segoe UI"/>
+              </a:rPr>
+              <a:t>One open item:  </a:t>
+            </a:r>
+            <a:r>
+              <a:rPr sz="1600">
+                <a:solidFill>
+                  <a:srgbClr val="1A1A2E"/>
+                </a:solidFill>
+                <a:latin typeface="Segoe UI"/>
+              </a:rPr>
+              <a:t>the Arabic voice's training-data licence is not stated — to be cleared before commercial use.</a:t>
             </a:r>
           </a:p>
         </p:txBody>
@@ -8698,7 +8810,7 @@
         </p:nvGraphicFramePr>
         <p:xfrm>
           <a:off x="640080" y="1234440"/>
-          <a:ext cx="10881360" cy="3291840"/>
+          <a:ext cx="10881360" cy="4754880"/>
         </p:xfrm>
         <a:graphic>
           <a:graphicData uri="http://schemas.openxmlformats.org/drawingml/2006/table">
@@ -9106,6 +9218,182 @@
                   </a:tcPr>
                 </a:tc>
               </a:tr>
+              <a:tr h="365760">
+                <a:tc>
+                  <a:txBody>
+                    <a:bodyPr/>
+                    <a:lstStyle/>
+                    <a:p>
+                      <a:r>
+                        <a:rPr sz="1300">
+                          <a:solidFill>
+                            <a:srgbClr val="1A1A2E"/>
+                          </a:solidFill>
+                        </a:rPr>
+                        <a:t>WER on recorded dialect clips</a:t>
+                      </a:r>
+                    </a:p>
+                  </a:txBody>
+                  <a:tcPr>
+                    <a:solidFill>
+                      <a:srgbClr val="FFFFFF"/>
+                    </a:solidFill>
+                  </a:tcPr>
+                </a:tc>
+                <a:tc>
+                  <a:txBody>
+                    <a:bodyPr/>
+                    <a:lstStyle/>
+                    <a:p>
+                      <a:r>
+                        <a:rPr sz="1300">
+                          <a:solidFill>
+                            <a:srgbClr val="1A1A2E"/>
+                          </a:solidFill>
+                        </a:rPr>
+                        <a:t>Harness and protocol are ready; the clips are not recorded</a:t>
+                      </a:r>
+                    </a:p>
+                  </a:txBody>
+                  <a:tcPr>
+                    <a:solidFill>
+                      <a:srgbClr val="FFFFFF"/>
+                    </a:solidFill>
+                  </a:tcPr>
+                </a:tc>
+              </a:tr>
+              <a:tr h="365760">
+                <a:tc>
+                  <a:txBody>
+                    <a:bodyPr/>
+                    <a:lstStyle/>
+                    <a:p>
+                      <a:r>
+                        <a:rPr sz="1300">
+                          <a:solidFill>
+                            <a:srgbClr val="1A1A2E"/>
+                          </a:solidFill>
+                        </a:rPr>
+                        <a:t>Calibrate the refusal gate; judge citation accuracy</a:t>
+                      </a:r>
+                    </a:p>
+                  </a:txBody>
+                  <a:tcPr>
+                    <a:solidFill>
+                      <a:srgbClr val="F4F4F8"/>
+                    </a:solidFill>
+                  </a:tcPr>
+                </a:tc>
+                <a:tc>
+                  <a:txBody>
+                    <a:bodyPr/>
+                    <a:lstStyle/>
+                    <a:p>
+                      <a:r>
+                        <a:rPr sz="1300">
+                          <a:solidFill>
+                            <a:srgbClr val="1A1A2E"/>
+                          </a:solidFill>
+                        </a:rPr>
+                        <a:t>Needs the deployment's own embedder and a judged answer set</a:t>
+                      </a:r>
+                    </a:p>
+                  </a:txBody>
+                  <a:tcPr>
+                    <a:solidFill>
+                      <a:srgbClr val="F4F4F8"/>
+                    </a:solidFill>
+                  </a:tcPr>
+                </a:tc>
+              </a:tr>
+              <a:tr h="365760">
+                <a:tc>
+                  <a:txBody>
+                    <a:bodyPr/>
+                    <a:lstStyle/>
+                    <a:p>
+                      <a:r>
+                        <a:rPr sz="1300">
+                          <a:solidFill>
+                            <a:srgbClr val="1A1A2E"/>
+                          </a:solidFill>
+                        </a:rPr>
+                        <a:t>Cleared Egyptian-dialect TTS voice</a:t>
+                      </a:r>
+                    </a:p>
+                  </a:txBody>
+                  <a:tcPr>
+                    <a:solidFill>
+                      <a:srgbClr val="FFFFFF"/>
+                    </a:solidFill>
+                  </a:tcPr>
+                </a:tc>
+                <a:tc>
+                  <a:txBody>
+                    <a:bodyPr/>
+                    <a:lstStyle/>
+                    <a:p>
+                      <a:r>
+                        <a:rPr sz="1300">
+                          <a:solidFill>
+                            <a:srgbClr val="1A1A2E"/>
+                          </a:solidFill>
+                        </a:rPr>
+                        <a:t>The only Arabic Piper voice has an unverified licence</a:t>
+                      </a:r>
+                    </a:p>
+                  </a:txBody>
+                  <a:tcPr>
+                    <a:solidFill>
+                      <a:srgbClr val="FFFFFF"/>
+                    </a:solidFill>
+                  </a:tcPr>
+                </a:tc>
+              </a:tr>
+              <a:tr h="365760">
+                <a:tc>
+                  <a:txBody>
+                    <a:bodyPr/>
+                    <a:lstStyle/>
+                    <a:p>
+                      <a:r>
+                        <a:rPr sz="1300">
+                          <a:solidFill>
+                            <a:srgbClr val="1A1A2E"/>
+                          </a:solidFill>
+                        </a:rPr>
+                        <a:t>Background document ingestion</a:t>
+                      </a:r>
+                    </a:p>
+                  </a:txBody>
+                  <a:tcPr>
+                    <a:solidFill>
+                      <a:srgbClr val="F4F4F8"/>
+                    </a:solidFill>
+                  </a:tcPr>
+                </a:tc>
+                <a:tc>
+                  <a:txBody>
+                    <a:bodyPr/>
+                    <a:lstStyle/>
+                    <a:p>
+                      <a:r>
+                        <a:rPr sz="1300">
+                          <a:solidFill>
+                            <a:srgbClr val="1A1A2E"/>
+                          </a:solidFill>
+                        </a:rPr>
+                        <a:t>Large uploads currently block their request</a:t>
+                      </a:r>
+                    </a:p>
+                  </a:txBody>
+                  <a:tcPr>
+                    <a:solidFill>
+                      <a:srgbClr val="F4F4F8"/>
+                    </a:solidFill>
+                  </a:tcPr>
+                </a:tc>
+              </a:tr>
             </a:tbl>
           </a:graphicData>
         </a:graphic>
@@ -9239,7 +9527,7 @@
               </a:rPr>
               <a:t>The core runs offline on a CPU.  Every answer is cited.
 The model detects intent and nothing else — the backend decides what happens.
-And the numbers in this deck came out of /metrics on the running system.</a:t>
+And the retrieval numbers in this deck came out of eval_rag.py, not a spreadsheet.</a:t>
             </a:r>
           </a:p>
         </p:txBody>
@@ -9502,7 +9790,7 @@
                 </a:solidFill>
                 <a:latin typeface="Segoe UI"/>
               </a:rPr>
-              <a:t>•  PDF / DOCX / TXT / image upload, scoped to the session only</a:t>
+              <a:t>•  PDF / DOCX / TXT / image upload, scoped to the session only — and masked before the model reads it</a:t>
             </a:r>
           </a:p>
           <a:p>
@@ -9977,7 +10265,7 @@
         </p:nvGraphicFramePr>
         <p:xfrm>
           <a:off x="640080" y="1600200"/>
-          <a:ext cx="10881360" cy="1828800"/>
+          <a:ext cx="10881360" cy="2560320"/>
         </p:xfrm>
         <a:graphic>
           <a:graphicData uri="http://schemas.openxmlformats.org/drawingml/2006/table">
@@ -10209,6 +10497,94 @@
                   </a:tcPr>
                 </a:tc>
               </a:tr>
+              <a:tr h="365760">
+                <a:tc>
+                  <a:txBody>
+                    <a:bodyPr/>
+                    <a:lstStyle/>
+                    <a:p>
+                      <a:r>
+                        <a:rPr sz="1300">
+                          <a:solidFill>
+                            <a:srgbClr val="1A1A2E"/>
+                          </a:solidFill>
+                        </a:rPr>
+                        <a:t>Nothing relevant retrieved</a:t>
+                      </a:r>
+                    </a:p>
+                  </a:txBody>
+                  <a:tcPr>
+                    <a:solidFill>
+                      <a:srgbClr val="FFFFFF"/>
+                    </a:solidFill>
+                  </a:tcPr>
+                </a:tc>
+                <a:tc>
+                  <a:txBody>
+                    <a:bodyPr/>
+                    <a:lstStyle/>
+                    <a:p>
+                      <a:r>
+                        <a:rPr sz="1300">
+                          <a:solidFill>
+                            <a:srgbClr val="1A1A2E"/>
+                          </a:solidFill>
+                        </a:rPr>
+                        <a:t>Declines without calling the model</a:t>
+                      </a:r>
+                    </a:p>
+                  </a:txBody>
+                  <a:tcPr>
+                    <a:solidFill>
+                      <a:srgbClr val="FFFFFF"/>
+                    </a:solidFill>
+                  </a:tcPr>
+                </a:tc>
+              </a:tr>
+              <a:tr h="365760">
+                <a:tc>
+                  <a:txBody>
+                    <a:bodyPr/>
+                    <a:lstStyle/>
+                    <a:p>
+                      <a:r>
+                        <a:rPr sz="1300">
+                          <a:solidFill>
+                            <a:srgbClr val="1A1A2E"/>
+                          </a:solidFill>
+                        </a:rPr>
+                        <a:t>Malformed intent output</a:t>
+                      </a:r>
+                    </a:p>
+                  </a:txBody>
+                  <a:tcPr>
+                    <a:solidFill>
+                      <a:srgbClr val="F4F4F8"/>
+                    </a:solidFill>
+                  </a:tcPr>
+                </a:tc>
+                <a:tc>
+                  <a:txBody>
+                    <a:bodyPr/>
+                    <a:lstStyle/>
+                    <a:p>
+                      <a:r>
+                        <a:rPr sz="1300">
+                          <a:solidFill>
+                            <a:srgbClr val="1A1A2E"/>
+                          </a:solidFill>
+                        </a:rPr>
+                        <a:t>Falls back to the read-only path — never to an action</a:t>
+                      </a:r>
+                    </a:p>
+                  </a:txBody>
+                  <a:tcPr>
+                    <a:solidFill>
+                      <a:srgbClr val="F4F4F8"/>
+                    </a:solidFill>
+                  </a:tcPr>
+                </a:tc>
+              </a:tr>
             </a:tbl>
           </a:graphicData>
         </a:graphic>
@@ -10412,6 +10788,22 @@
                 <a:latin typeface="Segoe UI"/>
               </a:rPr>
               <a:t>•  → hybrid retrieve (BM25 + dense → RRF) → rerank</a:t>
+            </a:r>
+          </a:p>
+          <a:p>
+            <a:pPr>
+              <a:spcAft>
+                <a:spcPts val="1000"/>
+              </a:spcAft>
+            </a:pPr>
+            <a:r>
+              <a:rPr sz="1600">
+                <a:solidFill>
+                  <a:srgbClr val="1A1A2E"/>
+                </a:solidFill>
+                <a:latin typeface="Segoe UI"/>
+              </a:rPr>
+              <a:t>•  → mask passages from the customer's own documents</a:t>
             </a:r>
           </a:p>
           <a:p>
